--- a/classes/parte-6-analisis-de-malware/144-analisis-dinamico-basico-y-sandboxing/clase-144-presentacion.pptx
+++ b/classes/parte-6-analisis-de-malware/144-analisis-dinamico-basico-y-sandboxing/clase-144-presentacion.pptx
@@ -17,6 +17,9 @@
     <p:sldId id="265" r:id="rId16"/>
     <p:sldId id="266" r:id="rId17"/>
     <p:sldId id="267" r:id="rId18"/>
+    <p:sldId id="268" r:id="rId19"/>
+    <p:sldId id="269" r:id="rId20"/>
+    <p:sldId id="270" r:id="rId21"/>
   </p:sldIdLst>
   <p:sldSz cx="9144000" cy="6858000" type="screen4x3"/>
   <p:notesSz cx="6858000" cy="9144000"/>
@@ -3198,7 +3201,7 @@
                   <a:srgbClr val="0B3D2E"/>
                 </a:solidFill>
               </a:rPr>
-              <a:t>⚠️ Errores comunes</a:t>
+              <a:t>✍️ Ejercicios</a:t>
             </a:r>
           </a:p>
         </p:txBody>
@@ -3236,67 +3239,82 @@
                   <a:srgbClr val="22282E"/>
                 </a:solidFill>
               </a:rPr>
-              <a:t>•  La muestra "no hace nada" — Detecta VM o espera C2; usa servicios simulados y desactiva artefactos de VM</a:t>
-            </a:r>
-          </a:p>
-          <a:p>
-            <a:pPr>
-              <a:spcAft>
-                <a:spcPts val="600"/>
-              </a:spcAft>
-            </a:pPr>
-            <a:r>
-              <a:rPr sz="1500">
-                <a:solidFill>
-                  <a:srgbClr val="22282E"/>
-                </a:solidFill>
-              </a:rPr>
-              <a:t>•  ProcMon con ruido inmanejable — Aplica filtros por proceso y operación antes de detonar</a:t>
-            </a:r>
-          </a:p>
-          <a:p>
-            <a:pPr>
-              <a:spcAft>
-                <a:spcPts val="600"/>
-              </a:spcAft>
-            </a:pPr>
-            <a:r>
-              <a:rPr sz="1500">
-                <a:solidFill>
-                  <a:srgbClr val="22282E"/>
-                </a:solidFill>
-              </a:rPr>
-              <a:t>•  Sin tráfico en Wireshark — Interfaz equivocada o INetSim caído; captura en labnet</a:t>
-            </a:r>
-          </a:p>
-          <a:p>
-            <a:pPr>
-              <a:spcAft>
-                <a:spcPts val="600"/>
-              </a:spcAft>
-            </a:pPr>
-            <a:r>
-              <a:rPr sz="1500">
-                <a:solidFill>
-                  <a:srgbClr val="22282E"/>
-                </a:solidFill>
-              </a:rPr>
-              <a:t>•  Persistencia no encontrada — Revisa Autoruns además de las claves Run; hay decenas de ASEPs</a:t>
-            </a:r>
-          </a:p>
-          <a:p>
-            <a:pPr>
-              <a:spcAft>
-                <a:spcPts val="600"/>
-              </a:spcAft>
-            </a:pPr>
-            <a:r>
-              <a:rPr sz="1500">
-                <a:solidFill>
-                  <a:srgbClr val="22282E"/>
-                </a:solidFill>
-              </a:rPr>
-              <a:t>•  Reinfección al repetir — No restauraste snapshot; vuelve a base-clean</a:t>
+              <a:t>•  Diferencia inyección de código de simple creación de proceso a partir de lo visto en Process Hacker.</a:t>
+            </a:r>
+          </a:p>
+          <a:p>
+            <a:pPr>
+              <a:spcAft>
+                <a:spcPts val="600"/>
+              </a:spcAft>
+            </a:pPr>
+            <a:r>
+              <a:rPr sz="1500">
+                <a:solidFill>
+                  <a:srgbClr val="22282E"/>
+                </a:solidFill>
+              </a:rPr>
+              <a:t>•  Documenta la persistencia hallada y cómo eliminarla.</a:t>
+            </a:r>
+          </a:p>
+          <a:p>
+            <a:pPr>
+              <a:spcAft>
+                <a:spcPts val="600"/>
+              </a:spcAft>
+            </a:pPr>
+            <a:r>
+              <a:rPr sz="1500">
+                <a:solidFill>
+                  <a:srgbClr val="22282E"/>
+                </a:solidFill>
+              </a:rPr>
+              <a:t>•  Extrae 5 IOCs de red del pcap y clasifícalos (DNS, HTTP, IP).</a:t>
+            </a:r>
+          </a:p>
+          <a:p>
+            <a:pPr>
+              <a:spcAft>
+                <a:spcPts val="600"/>
+              </a:spcAft>
+            </a:pPr>
+            <a:r>
+              <a:rPr sz="1500">
+                <a:solidFill>
+                  <a:srgbClr val="22282E"/>
+                </a:solidFill>
+              </a:rPr>
+              <a:t>•  Explica por qué el mutex es un buen indicador de detección.</a:t>
+            </a:r>
+          </a:p>
+          <a:p>
+            <a:pPr>
+              <a:spcAft>
+                <a:spcPts val="600"/>
+              </a:spcAft>
+            </a:pPr>
+            <a:r>
+              <a:rPr sz="1500">
+                <a:solidFill>
+                  <a:srgbClr val="22282E"/>
+                </a:solidFill>
+              </a:rPr>
+              <a:t>•  Compara tu análisis manual con el informe del sandbox: ¿qué se le escapó a cada uno?</a:t>
+            </a:r>
+          </a:p>
+          <a:p>
+            <a:pPr>
+              <a:spcAft>
+                <a:spcPts val="600"/>
+              </a:spcAft>
+            </a:pPr>
+            <a:r>
+              <a:rPr sz="1500">
+                <a:solidFill>
+                  <a:srgbClr val="22282E"/>
+                </a:solidFill>
+              </a:rPr>
+              <a:t>•  Diseña un filtro de ProcMon reutilizable para triaje.</a:t>
             </a:r>
           </a:p>
         </p:txBody>
@@ -3347,7 +3365,7 @@
                   <a:srgbClr val="0B3D2E"/>
                 </a:solidFill>
               </a:rPr>
-              <a:t>❓ Preguntas frecuentes</a:t>
+              <a:t>📝 Reto verificable</a:t>
             </a:r>
           </a:p>
         </p:txBody>
@@ -3385,37 +3403,22 @@
                   <a:srgbClr val="22282E"/>
                 </a:solidFill>
               </a:rPr>
-              <a:t>•  ❓ ¿Análisis dinámico reemplaza al estático? No, se complementan. El dinámico ve comportamiento real pero puede no cubrir ramas condicionadas por fecha o C2.</a:t>
-            </a:r>
-          </a:p>
-          <a:p>
-            <a:pPr>
-              <a:spcAft>
-                <a:spcPts val="600"/>
-              </a:spcAft>
-            </a:pPr>
-            <a:r>
-              <a:rPr sz="1500">
-                <a:solidFill>
-                  <a:srgbClr val="22282E"/>
-                </a:solidFill>
-              </a:rPr>
-              <a:t>•  ❓ ¿Puedo confiar en un sandbox online? Es rápido pero público: no subas muestras sensibles. Además el malware puede detectar sandboxes conocidos y no ejecutar la carga.</a:t>
-            </a:r>
-          </a:p>
-          <a:p>
-            <a:pPr>
-              <a:spcAft>
-                <a:spcPts val="600"/>
-              </a:spcAft>
-            </a:pPr>
-            <a:r>
-              <a:rPr sz="1500">
-                <a:solidFill>
-                  <a:srgbClr val="22282E"/>
-                </a:solidFill>
-              </a:rPr>
-              <a:t>•  ❓ ¿Qué hago si necesita Internet real? Simula el C2 con INetSim/redirección, o replica el servidor. Nunca des salida real a la muestra desde el lab.</a:t>
+              <a:t>•  Entrega un informe de comportamiento de una muestra con: árbol de procesos, persistencia (clave/servicio/tarea), archivos creados, mutex e IOCs de red, todo respaldado por capturas.</a:t>
+            </a:r>
+          </a:p>
+          <a:p>
+            <a:pPr>
+              <a:spcAft>
+                <a:spcPts val="600"/>
+              </a:spcAft>
+            </a:pPr>
+            <a:r>
+              <a:rPr sz="1500">
+                <a:solidFill>
+                  <a:srgbClr val="22282E"/>
+                </a:solidFill>
+              </a:rPr>
+              <a:t>•  Criterio de aceptación: cada IOC listado aparece en una evidencia (ProcMon/Regshot/Wireshark) referenciada, y el informe indica cómo se detectaría y eliminaría la persistencia.</a:t>
             </a:r>
           </a:p>
         </p:txBody>
@@ -3466,7 +3469,7 @@
                   <a:srgbClr val="0B3D2E"/>
                 </a:solidFill>
               </a:rPr>
-              <a:t>🔗 Referencias</a:t>
+              <a:t>⚠️ Errores comunes</a:t>
             </a:r>
           </a:p>
         </p:txBody>
@@ -3504,6 +3507,274 @@
                   <a:srgbClr val="22282E"/>
                 </a:solidFill>
               </a:rPr>
+              <a:t>•  La muestra "no hace nada" — Detecta VM o espera C2; usa servicios simulados y desactiva artefactos de VM</a:t>
+            </a:r>
+          </a:p>
+          <a:p>
+            <a:pPr>
+              <a:spcAft>
+                <a:spcPts val="600"/>
+              </a:spcAft>
+            </a:pPr>
+            <a:r>
+              <a:rPr sz="1500">
+                <a:solidFill>
+                  <a:srgbClr val="22282E"/>
+                </a:solidFill>
+              </a:rPr>
+              <a:t>•  ProcMon con ruido inmanejable — Aplica filtros por proceso y operación antes de detonar</a:t>
+            </a:r>
+          </a:p>
+          <a:p>
+            <a:pPr>
+              <a:spcAft>
+                <a:spcPts val="600"/>
+              </a:spcAft>
+            </a:pPr>
+            <a:r>
+              <a:rPr sz="1500">
+                <a:solidFill>
+                  <a:srgbClr val="22282E"/>
+                </a:solidFill>
+              </a:rPr>
+              <a:t>•  Sin tráfico en Wireshark — Interfaz equivocada o INetSim caído; captura en labnet</a:t>
+            </a:r>
+          </a:p>
+          <a:p>
+            <a:pPr>
+              <a:spcAft>
+                <a:spcPts val="600"/>
+              </a:spcAft>
+            </a:pPr>
+            <a:r>
+              <a:rPr sz="1500">
+                <a:solidFill>
+                  <a:srgbClr val="22282E"/>
+                </a:solidFill>
+              </a:rPr>
+              <a:t>•  Persistencia no encontrada — Revisa Autoruns además de las claves Run; hay decenas de ASEPs</a:t>
+            </a:r>
+          </a:p>
+          <a:p>
+            <a:pPr>
+              <a:spcAft>
+                <a:spcPts val="600"/>
+              </a:spcAft>
+            </a:pPr>
+            <a:r>
+              <a:rPr sz="1500">
+                <a:solidFill>
+                  <a:srgbClr val="22282E"/>
+                </a:solidFill>
+              </a:rPr>
+              <a:t>•  Reinfección al repetir — No restauraste snapshot; vuelve a base-clean</a:t>
+            </a:r>
+          </a:p>
+        </p:txBody>
+      </p:sp>
+    </p:spTree>
+  </p:cSld>
+  <p:clrMapOvr>
+    <a:masterClrMapping/>
+  </p:clrMapOvr>
+</p:sld>
+</file>
+
+<file path=ppt/slides/slide13.xml><?xml version="1.0" encoding="utf-8"?>
+<p:sld xmlns:a="http://schemas.openxmlformats.org/drawingml/2006/main" xmlns:p="http://schemas.openxmlformats.org/presentationml/2006/main" xmlns:r="http://schemas.openxmlformats.org/officeDocument/2006/relationships">
+  <p:cSld>
+    <p:spTree>
+      <p:nvGrpSpPr>
+        <p:cNvPr id="1" name=""/>
+        <p:cNvGrpSpPr/>
+        <p:nvPr/>
+      </p:nvGrpSpPr>
+      <p:grpSpPr/>
+      <p:sp>
+        <p:nvSpPr>
+          <p:cNvPr id="2" name="TextBox 1"/>
+          <p:cNvSpPr txBox="1"/>
+          <p:nvPr/>
+        </p:nvSpPr>
+        <p:spPr>
+          <a:xfrm>
+            <a:off x="457200" y="320040"/>
+            <a:ext cx="8229600" cy="822960"/>
+          </a:xfrm>
+          <a:prstGeom prst="rect">
+            <a:avLst/>
+          </a:prstGeom>
+          <a:noFill/>
+        </p:spPr>
+        <p:txBody>
+          <a:bodyPr wrap="square">
+            <a:spAutoFit/>
+          </a:bodyPr>
+          <a:lstStyle/>
+          <a:p>
+            <a:r>
+              <a:rPr sz="2600" b="1">
+                <a:solidFill>
+                  <a:srgbClr val="0B3D2E"/>
+                </a:solidFill>
+              </a:rPr>
+              <a:t>❓ Preguntas frecuentes</a:t>
+            </a:r>
+          </a:p>
+        </p:txBody>
+      </p:sp>
+      <p:sp>
+        <p:nvSpPr>
+          <p:cNvPr id="3" name="TextBox 2"/>
+          <p:cNvSpPr txBox="1"/>
+          <p:nvPr/>
+        </p:nvSpPr>
+        <p:spPr>
+          <a:xfrm>
+            <a:off x="457200" y="1280160"/>
+            <a:ext cx="8229600" cy="4937760"/>
+          </a:xfrm>
+          <a:prstGeom prst="rect">
+            <a:avLst/>
+          </a:prstGeom>
+          <a:noFill/>
+        </p:spPr>
+        <p:txBody>
+          <a:bodyPr wrap="square">
+            <a:spAutoFit/>
+          </a:bodyPr>
+          <a:lstStyle/>
+          <a:p>
+            <a:pPr>
+              <a:spcAft>
+                <a:spcPts val="600"/>
+              </a:spcAft>
+            </a:pPr>
+            <a:r>
+              <a:rPr sz="1500">
+                <a:solidFill>
+                  <a:srgbClr val="22282E"/>
+                </a:solidFill>
+              </a:rPr>
+              <a:t>•  ❓ ¿Análisis dinámico reemplaza al estático? No, se complementan. El dinámico ve comportamiento real pero puede no cubrir ramas condicionadas por fecha o C2.</a:t>
+            </a:r>
+          </a:p>
+          <a:p>
+            <a:pPr>
+              <a:spcAft>
+                <a:spcPts val="600"/>
+              </a:spcAft>
+            </a:pPr>
+            <a:r>
+              <a:rPr sz="1500">
+                <a:solidFill>
+                  <a:srgbClr val="22282E"/>
+                </a:solidFill>
+              </a:rPr>
+              <a:t>•  ❓ ¿Puedo confiar en un sandbox online? Es rápido pero público: no subas muestras sensibles. Además el malware puede detectar sandboxes conocidos y no ejecutar la carga.</a:t>
+            </a:r>
+          </a:p>
+          <a:p>
+            <a:pPr>
+              <a:spcAft>
+                <a:spcPts val="600"/>
+              </a:spcAft>
+            </a:pPr>
+            <a:r>
+              <a:rPr sz="1500">
+                <a:solidFill>
+                  <a:srgbClr val="22282E"/>
+                </a:solidFill>
+              </a:rPr>
+              <a:t>•  ❓ ¿Qué hago si necesita Internet real? Simula el C2 con INetSim/redirección, o replica el servidor. Nunca des salida real a la muestra desde el lab.</a:t>
+            </a:r>
+          </a:p>
+        </p:txBody>
+      </p:sp>
+    </p:spTree>
+  </p:cSld>
+  <p:clrMapOvr>
+    <a:masterClrMapping/>
+  </p:clrMapOvr>
+</p:sld>
+</file>
+
+<file path=ppt/slides/slide14.xml><?xml version="1.0" encoding="utf-8"?>
+<p:sld xmlns:a="http://schemas.openxmlformats.org/drawingml/2006/main" xmlns:p="http://schemas.openxmlformats.org/presentationml/2006/main" xmlns:r="http://schemas.openxmlformats.org/officeDocument/2006/relationships">
+  <p:cSld>
+    <p:spTree>
+      <p:nvGrpSpPr>
+        <p:cNvPr id="1" name=""/>
+        <p:cNvGrpSpPr/>
+        <p:nvPr/>
+      </p:nvGrpSpPr>
+      <p:grpSpPr/>
+      <p:sp>
+        <p:nvSpPr>
+          <p:cNvPr id="2" name="TextBox 1"/>
+          <p:cNvSpPr txBox="1"/>
+          <p:nvPr/>
+        </p:nvSpPr>
+        <p:spPr>
+          <a:xfrm>
+            <a:off x="457200" y="320040"/>
+            <a:ext cx="8229600" cy="822960"/>
+          </a:xfrm>
+          <a:prstGeom prst="rect">
+            <a:avLst/>
+          </a:prstGeom>
+          <a:noFill/>
+        </p:spPr>
+        <p:txBody>
+          <a:bodyPr wrap="square">
+            <a:spAutoFit/>
+          </a:bodyPr>
+          <a:lstStyle/>
+          <a:p>
+            <a:r>
+              <a:rPr sz="2600" b="1">
+                <a:solidFill>
+                  <a:srgbClr val="0B3D2E"/>
+                </a:solidFill>
+              </a:rPr>
+              <a:t>🔗 Referencias</a:t>
+            </a:r>
+          </a:p>
+        </p:txBody>
+      </p:sp>
+      <p:sp>
+        <p:nvSpPr>
+          <p:cNvPr id="3" name="TextBox 2"/>
+          <p:cNvSpPr txBox="1"/>
+          <p:nvPr/>
+        </p:nvSpPr>
+        <p:spPr>
+          <a:xfrm>
+            <a:off x="457200" y="1280160"/>
+            <a:ext cx="8229600" cy="4937760"/>
+          </a:xfrm>
+          <a:prstGeom prst="rect">
+            <a:avLst/>
+          </a:prstGeom>
+          <a:noFill/>
+        </p:spPr>
+        <p:txBody>
+          <a:bodyPr wrap="square">
+            <a:spAutoFit/>
+          </a:bodyPr>
+          <a:lstStyle/>
+          <a:p>
+            <a:pPr>
+              <a:spcAft>
+                <a:spcPts val="600"/>
+              </a:spcAft>
+            </a:pPr>
+            <a:r>
+              <a:rPr sz="1500">
+                <a:solidFill>
+                  <a:srgbClr val="22282E"/>
+                </a:solidFill>
+              </a:rPr>
               <a:t>•  Monnappa K. A., Learning Malware Analysis, cap. 3–4.</a:t>
             </a:r>
           </a:p>
@@ -3554,6 +3825,81 @@
           </a:p>
         </p:txBody>
       </p:sp>
+    </p:spTree>
+  </p:cSld>
+  <p:clrMapOvr>
+    <a:masterClrMapping/>
+  </p:clrMapOvr>
+</p:sld>
+</file>
+
+<file path=ppt/slides/slide15.xml><?xml version="1.0" encoding="utf-8"?>
+<p:sld xmlns:a="http://schemas.openxmlformats.org/drawingml/2006/main" xmlns:p="http://schemas.openxmlformats.org/presentationml/2006/main" xmlns:r="http://schemas.openxmlformats.org/officeDocument/2006/relationships">
+  <p:cSld>
+    <p:spTree>
+      <p:nvGrpSpPr>
+        <p:cNvPr id="1" name=""/>
+        <p:cNvGrpSpPr/>
+        <p:nvPr/>
+      </p:nvGrpSpPr>
+      <p:grpSpPr/>
+      <p:sp>
+        <p:nvSpPr>
+          <p:cNvPr id="2" name="TextBox 1"/>
+          <p:cNvSpPr txBox="1"/>
+          <p:nvPr/>
+        </p:nvSpPr>
+        <p:spPr>
+          <a:xfrm>
+            <a:off x="457200" y="274320"/>
+            <a:ext cx="8229600" cy="640080"/>
+          </a:xfrm>
+          <a:prstGeom prst="rect">
+            <a:avLst/>
+          </a:prstGeom>
+          <a:noFill/>
+        </p:spPr>
+        <p:txBody>
+          <a:bodyPr wrap="square">
+            <a:spAutoFit/>
+          </a:bodyPr>
+          <a:lstStyle/>
+          <a:p>
+            <a:r>
+              <a:rPr sz="2200" b="1">
+                <a:solidFill>
+                  <a:srgbClr val="0B3D2E"/>
+                </a:solidFill>
+              </a:rPr>
+              <a:t>Diagrama de la clase</a:t>
+            </a:r>
+          </a:p>
+        </p:txBody>
+      </p:sp>
+      <p:pic>
+        <p:nvPicPr>
+          <p:cNvPr id="3" name="Picture 2" descr="c5c7db6ed2d994ae.png"/>
+          <p:cNvPicPr>
+            <a:picLocks noChangeAspect="1"/>
+          </p:cNvPicPr>
+          <p:nvPr/>
+        </p:nvPicPr>
+        <p:blipFill>
+          <a:blip r:embed="rId2"/>
+          <a:stretch>
+            <a:fillRect/>
+          </a:stretch>
+        </p:blipFill>
+        <p:spPr>
+          <a:xfrm>
+            <a:off x="457200" y="2336292"/>
+            <a:ext cx="8229600" cy="2825496"/>
+          </a:xfrm>
+          <a:prstGeom prst="rect">
+            <a:avLst/>
+          </a:prstGeom>
+        </p:spPr>
+      </p:pic>
     </p:spTree>
   </p:cSld>
   <p:clrMapOvr>
@@ -3638,7 +3984,7 @@
                   <a:srgbClr val="22282E"/>
                 </a:solidFill>
               </a:rPr>
-              <a:t>•  Observar el malware en ejecución dentro del laboratorio aislado para registrar qué hace: procesos que crea, archivos y claves de registro que toca, y tráfico de red que genera. El alumno aprenderá a instrumentar el sistema, detonar la muestra de forma controlada y extraer IOCs de comportamiento, además de aprovechar sandboxes automatizados.</a:t>
+              <a:t>•  Observar el malware en ejecución dentro del laboratorio aislado para registrar qué hace: procesos que crea, archivos y claves de registro que toca, y tráfico de red que genera. El alumno aprenderá a…</a:t>
             </a:r>
           </a:p>
         </p:txBody>
@@ -4032,7 +4378,7 @@
                   <a:srgbClr val="0B3D2E"/>
                 </a:solidFill>
               </a:rPr>
-              <a:t>📖 Definiciones y características</a:t>
+              <a:t>🧠 Explicación en profundidad</a:t>
             </a:r>
           </a:p>
         </p:txBody>
@@ -4070,67 +4416,97 @@
                   <a:srgbClr val="22282E"/>
                 </a:solidFill>
               </a:rPr>
-              <a:t>•  Análisis dinámico: estudio del malware ejecutándolo. Característica clave: comportamiento observable.</a:t>
-            </a:r>
-          </a:p>
-          <a:p>
-            <a:pPr>
-              <a:spcAft>
-                <a:spcPts val="600"/>
-              </a:spcAft>
-            </a:pPr>
-            <a:r>
-              <a:rPr sz="1500">
-                <a:solidFill>
-                  <a:srgbClr val="22282E"/>
-                </a:solidFill>
-              </a:rPr>
-              <a:t>•  Mutex: objeto de sincronización que el malware crea para no reinfectar. Característica clave: IOC estable.</a:t>
-            </a:r>
-          </a:p>
-          <a:p>
-            <a:pPr>
-              <a:spcAft>
-                <a:spcPts val="600"/>
-              </a:spcAft>
-            </a:pPr>
-            <a:r>
-              <a:rPr sz="1500">
-                <a:solidFill>
-                  <a:srgbClr val="22282E"/>
-                </a:solidFill>
-              </a:rPr>
-              <a:t>•  Sandbox: entorno automatizado que ejecuta y reporta la muestra. Característica clave: triaje a escala.</a:t>
-            </a:r>
-          </a:p>
-          <a:p>
-            <a:pPr>
-              <a:spcAft>
-                <a:spcPts val="600"/>
-              </a:spcAft>
-            </a:pPr>
-            <a:r>
-              <a:rPr sz="1500">
-                <a:solidFill>
-                  <a:srgbClr val="22282E"/>
-                </a:solidFill>
-              </a:rPr>
-              <a:t>•  Persistencia: mecanismo para sobrevivir al reinicio (Run key, servicio, tarea). Característica clave: continuidad.</a:t>
-            </a:r>
-          </a:p>
-          <a:p>
-            <a:pPr>
-              <a:spcAft>
-                <a:spcPts val="600"/>
-              </a:spcAft>
-            </a:pPr>
-            <a:r>
-              <a:rPr sz="1500">
-                <a:solidFill>
-                  <a:srgbClr val="22282E"/>
-                </a:solidFill>
-              </a:rPr>
-              <a:t>•  IOC de comportamiento: artefacto observado (archivo, clave, dominio). Característica clave: detección posterior.</a:t>
+              <a:t>•  El análisis dinámico básico ejecuta la muestra en el laboratorio aislado (clase 142) y observa</a:t>
+            </a:r>
+          </a:p>
+          <a:p>
+            <a:pPr>
+              <a:spcAft>
+                <a:spcPts val="600"/>
+              </a:spcAft>
+            </a:pPr>
+            <a:r>
+              <a:rPr sz="1500">
+                <a:solidFill>
+                  <a:srgbClr val="22282E"/>
+                </a:solidFill>
+              </a:rPr>
+              <a:t>•  su comportamiento: qué ficheros crea, qué claves de registro toca, qué procesos lanza, con qué</a:t>
+            </a:r>
+          </a:p>
+          <a:p>
+            <a:pPr>
+              <a:spcAft>
+                <a:spcPts val="600"/>
+              </a:spcAft>
+            </a:pPr>
+            <a:r>
+              <a:rPr sz="1500">
+                <a:solidFill>
+                  <a:srgbClr val="22282E"/>
+                </a:solidFill>
+              </a:rPr>
+              <a:t>•  servidores intenta comunicarse. Su ventaja sobre el estático es directa: muestra lo que el malware</a:t>
+            </a:r>
+          </a:p>
+          <a:p>
+            <a:pPr>
+              <a:spcAft>
+                <a:spcPts val="600"/>
+              </a:spcAft>
+            </a:pPr>
+            <a:r>
+              <a:rPr sz="1500">
+                <a:solidFill>
+                  <a:srgbClr val="22282E"/>
+                </a:solidFill>
+              </a:rPr>
+              <a:t>•  hace de verdad, atravesando el packing y la ofuscación que ocultan el código —un binario empaquetado</a:t>
+            </a:r>
+          </a:p>
+          <a:p>
+            <a:pPr>
+              <a:spcAft>
+                <a:spcPts val="600"/>
+              </a:spcAft>
+            </a:pPr>
+            <a:r>
+              <a:rPr sz="1500">
+                <a:solidFill>
+                  <a:srgbClr val="22282E"/>
+                </a:solidFill>
+              </a:rPr>
+              <a:t>•  no revela sus strings al análisis estático, pero al ejecutarse actúa, y esa acción se puede</a:t>
+            </a:r>
+          </a:p>
+          <a:p>
+            <a:pPr>
+              <a:spcAft>
+                <a:spcPts val="600"/>
+              </a:spcAft>
+            </a:pPr>
+            <a:r>
+              <a:rPr sz="1500">
+                <a:solidFill>
+                  <a:srgbClr val="22282E"/>
+                </a:solidFill>
+              </a:rPr>
+              <a:t>•  observar—. Su límite: solo se ve lo que ocurre en esa ejecución (el malware puede tener ramas que no</a:t>
+            </a:r>
+          </a:p>
+          <a:p>
+            <a:pPr>
+              <a:spcAft>
+                <a:spcPts val="600"/>
+              </a:spcAft>
+            </a:pPr>
+            <a:r>
+              <a:rPr sz="1500">
+                <a:solidFill>
+                  <a:srgbClr val="22282E"/>
+                </a:solidFill>
+              </a:rPr>
+              <a:t>•  se activan sin cierta fecha, cierto argumento o cierta respuesta del C2), y hay riesgo real, de ahí el</a:t>
             </a:r>
           </a:p>
         </p:txBody>
@@ -4181,7 +4557,7 @@
                   <a:srgbClr val="0B3D2E"/>
                 </a:solidFill>
               </a:rPr>
-              <a:t>🧰 Herramientas y preparación</a:t>
+              <a:t>📖 Definiciones y características</a:t>
             </a:r>
           </a:p>
         </p:txBody>
@@ -4219,67 +4595,67 @@
                   <a:srgbClr val="22282E"/>
                 </a:solidFill>
               </a:rPr>
-              <a:t>•  Process Monitor (ProcMon) y Process Hacker / Process Explorer.</a:t>
-            </a:r>
-          </a:p>
-          <a:p>
-            <a:pPr>
-              <a:spcAft>
-                <a:spcPts val="600"/>
-              </a:spcAft>
-            </a:pPr>
-            <a:r>
-              <a:rPr sz="1500">
-                <a:solidFill>
-                  <a:srgbClr val="22282E"/>
-                </a:solidFill>
-              </a:rPr>
-              <a:t>•  Regshot (snapshot de registro y sistema de archivos antes/después).</a:t>
-            </a:r>
-          </a:p>
-          <a:p>
-            <a:pPr>
-              <a:spcAft>
-                <a:spcPts val="600"/>
-              </a:spcAft>
-            </a:pPr>
-            <a:r>
-              <a:rPr sz="1500">
-                <a:solidFill>
-                  <a:srgbClr val="22282E"/>
-                </a:solidFill>
-              </a:rPr>
-              <a:t>•  Wireshark + INetSim/FakeNet-NG (de la clase 142).</a:t>
-            </a:r>
-          </a:p>
-          <a:p>
-            <a:pPr>
-              <a:spcAft>
-                <a:spcPts val="600"/>
-              </a:spcAft>
-            </a:pPr>
-            <a:r>
-              <a:rPr sz="1500">
-                <a:solidFill>
-                  <a:srgbClr val="22282E"/>
-                </a:solidFill>
-              </a:rPr>
-              <a:t>•  Autoruns (Sysinternals) para persistencia.</a:t>
-            </a:r>
-          </a:p>
-          <a:p>
-            <a:pPr>
-              <a:spcAft>
-                <a:spcPts val="600"/>
-              </a:spcAft>
-            </a:pPr>
-            <a:r>
-              <a:rPr sz="1500">
-                <a:solidFill>
-                  <a:srgbClr val="22282E"/>
-                </a:solidFill>
-              </a:rPr>
-              <a:t>•  Sandbox: CAPEv2 o Cuckoo local; online: Any.Run, Hybrid Analysis (con precauciones de confidencialidad).</a:t>
+              <a:t>•  Análisis dinámico: estudio del malware ejecutándolo. Característica clave: comportamiento observable.</a:t>
+            </a:r>
+          </a:p>
+          <a:p>
+            <a:pPr>
+              <a:spcAft>
+                <a:spcPts val="600"/>
+              </a:spcAft>
+            </a:pPr>
+            <a:r>
+              <a:rPr sz="1500">
+                <a:solidFill>
+                  <a:srgbClr val="22282E"/>
+                </a:solidFill>
+              </a:rPr>
+              <a:t>•  Mutex: objeto de sincronización que el malware crea para no reinfectar. Característica clave: IOC estable.</a:t>
+            </a:r>
+          </a:p>
+          <a:p>
+            <a:pPr>
+              <a:spcAft>
+                <a:spcPts val="600"/>
+              </a:spcAft>
+            </a:pPr>
+            <a:r>
+              <a:rPr sz="1500">
+                <a:solidFill>
+                  <a:srgbClr val="22282E"/>
+                </a:solidFill>
+              </a:rPr>
+              <a:t>•  Sandbox: entorno automatizado que ejecuta y reporta la muestra. Característica clave: triaje a escala.</a:t>
+            </a:r>
+          </a:p>
+          <a:p>
+            <a:pPr>
+              <a:spcAft>
+                <a:spcPts val="600"/>
+              </a:spcAft>
+            </a:pPr>
+            <a:r>
+              <a:rPr sz="1500">
+                <a:solidFill>
+                  <a:srgbClr val="22282E"/>
+                </a:solidFill>
+              </a:rPr>
+              <a:t>•  Persistencia: mecanismo para sobrevivir al reinicio (Run key, servicio, tarea). Característica clave: continuidad.</a:t>
+            </a:r>
+          </a:p>
+          <a:p>
+            <a:pPr>
+              <a:spcAft>
+                <a:spcPts val="600"/>
+              </a:spcAft>
+            </a:pPr>
+            <a:r>
+              <a:rPr sz="1500">
+                <a:solidFill>
+                  <a:srgbClr val="22282E"/>
+                </a:solidFill>
+              </a:rPr>
+              <a:t>•  IOC de comportamiento: artefacto observado (archivo, clave, dominio). Característica clave: detección posterior.</a:t>
             </a:r>
           </a:p>
         </p:txBody>
@@ -4330,7 +4706,7 @@
                   <a:srgbClr val="0B3D2E"/>
                 </a:solidFill>
               </a:rPr>
-              <a:t>🧪 Laboratorio guiado</a:t>
+              <a:t>📔 Glosario</a:t>
             </a:r>
           </a:p>
         </p:txBody>
@@ -4368,97 +4744,97 @@
                   <a:srgbClr val="22282E"/>
                 </a:solidFill>
               </a:rPr>
-              <a:t>•  Restaura el snapshot base-clean. Verifica que el aislamiento de red sigue activo y que INetSim responde.</a:t>
-            </a:r>
-          </a:p>
-          <a:p>
-            <a:pPr>
-              <a:spcAft>
-                <a:spcPts val="600"/>
-              </a:spcAft>
-            </a:pPr>
-            <a:r>
-              <a:rPr sz="1500">
-                <a:solidFill>
-                  <a:srgbClr val="22282E"/>
-                </a:solidFill>
-              </a:rPr>
-              <a:t>•  Prepara la instrumentación: abre ProcMon (con filtro por el nombre del proceso), Process Hacker, Wireshark capturando en la interfaz de labnet, y toma un Regshot inicial.</a:t>
-            </a:r>
-          </a:p>
-          <a:p>
-            <a:pPr>
-              <a:spcAft>
-                <a:spcPts val="600"/>
-              </a:spcAft>
-            </a:pPr>
-            <a:r>
-              <a:rPr sz="1500">
-                <a:solidFill>
-                  <a:srgbClr val="22282E"/>
-                </a:solidFill>
-              </a:rPr>
-              <a:t>•  Detona la muestra con privilegios normales. Observa en Process Hacker los procesos hijos y las inyecciones (hilos remotos).</a:t>
-            </a:r>
-          </a:p>
-          <a:p>
-            <a:pPr>
-              <a:spcAft>
-                <a:spcPts val="600"/>
-              </a:spcAft>
-            </a:pPr>
-            <a:r>
-              <a:rPr sz="1500">
-                <a:solidFill>
-                  <a:srgbClr val="22282E"/>
-                </a:solidFill>
-              </a:rPr>
-              <a:t>•  Deja correr ~60–120 s. Toma el segundo Regshot y compara: archivos creados, claves Run, servicios o tareas programadas nuevas.</a:t>
-            </a:r>
-          </a:p>
-          <a:p>
-            <a:pPr>
-              <a:spcAft>
-                <a:spcPts val="600"/>
-              </a:spcAft>
-            </a:pPr>
-            <a:r>
-              <a:rPr sz="1500">
-                <a:solidFill>
-                  <a:srgbClr val="22282E"/>
-                </a:solidFill>
-              </a:rPr>
-              <a:t>•  En ProcMon, filtra por Operation is RegSetValue y por CreateFile para localizar persistencia y drops. Anota rutas y claves.</a:t>
-            </a:r>
-          </a:p>
-          <a:p>
-            <a:pPr>
-              <a:spcAft>
-                <a:spcPts val="600"/>
-              </a:spcAft>
-            </a:pPr>
-            <a:r>
-              <a:rPr sz="1500">
-                <a:solidFill>
-                  <a:srgbClr val="22282E"/>
-                </a:solidFill>
-              </a:rPr>
-              <a:t>•  Revisa Wireshark: dominios consultados (respondidos por INetSim), URIs HTTP, user-agents, patrones de beacon. Extrae IOCs de red.</a:t>
-            </a:r>
-          </a:p>
-          <a:p>
-            <a:pPr>
-              <a:spcAft>
-                <a:spcPts val="600"/>
-              </a:spcAft>
-            </a:pPr>
-            <a:r>
-              <a:rPr sz="1500">
-                <a:solidFill>
-                  <a:srgbClr val="22282E"/>
-                </a:solidFill>
-              </a:rPr>
-              <a:t>•  Identifica el mutex creado (Process Hacker → Handles → Mutant). Anótalo como IOC.</a:t>
+              <a:t>•  Término — Definición concisa</a:t>
+            </a:r>
+          </a:p>
+          <a:p>
+            <a:pPr>
+              <a:spcAft>
+                <a:spcPts val="600"/>
+              </a:spcAft>
+            </a:pPr>
+            <a:r>
+              <a:rPr sz="1500">
+                <a:solidFill>
+                  <a:srgbClr val="22282E"/>
+                </a:solidFill>
+              </a:rPr>
+              <a:t>•  Análisis dinámico — Ejecutar la muestra y observar su comportamiento</a:t>
+            </a:r>
+          </a:p>
+          <a:p>
+            <a:pPr>
+              <a:spcAft>
+                <a:spcPts val="600"/>
+              </a:spcAft>
+            </a:pPr>
+            <a:r>
+              <a:rPr sz="1500">
+                <a:solidFill>
+                  <a:srgbClr val="22282E"/>
+                </a:solidFill>
+              </a:rPr>
+              <a:t>•  Baseline — Estado del sistema limpio para comparar</a:t>
+            </a:r>
+          </a:p>
+          <a:p>
+            <a:pPr>
+              <a:spcAft>
+                <a:spcPts val="600"/>
+              </a:spcAft>
+            </a:pPr>
+            <a:r>
+              <a:rPr sz="1500">
+                <a:solidFill>
+                  <a:srgbClr val="22282E"/>
+                </a:solidFill>
+              </a:rPr>
+              <a:t>•  Comparación de estado — Diferencial antes/después que aísla la actividad</a:t>
+            </a:r>
+          </a:p>
+          <a:p>
+            <a:pPr>
+              <a:spcAft>
+                <a:spcPts val="600"/>
+              </a:spcAft>
+            </a:pPr>
+            <a:r>
+              <a:rPr sz="1500">
+                <a:solidFill>
+                  <a:srgbClr val="22282E"/>
+                </a:solidFill>
+              </a:rPr>
+              <a:t>•  Process Monitor (ProcMon) — Registra operaciones de ficheros, registro, procesos, red</a:t>
+            </a:r>
+          </a:p>
+          <a:p>
+            <a:pPr>
+              <a:spcAft>
+                <a:spcPts val="600"/>
+              </a:spcAft>
+            </a:pPr>
+            <a:r>
+              <a:rPr sz="1500">
+                <a:solidFill>
+                  <a:srgbClr val="22282E"/>
+                </a:solidFill>
+              </a:rPr>
+              <a:t>•  Process Hacker — Muestra el árbol de procesos, memoria y handles</a:t>
+            </a:r>
+          </a:p>
+          <a:p>
+            <a:pPr>
+              <a:spcAft>
+                <a:spcPts val="600"/>
+              </a:spcAft>
+            </a:pPr>
+            <a:r>
+              <a:rPr sz="1500">
+                <a:solidFill>
+                  <a:srgbClr val="22282E"/>
+                </a:solidFill>
+              </a:rPr>
+              <a:t>•  Regshot — Diff del registro antes y después</a:t>
             </a:r>
           </a:p>
         </p:txBody>
@@ -4509,7 +4885,7 @@
                   <a:srgbClr val="0B3D2E"/>
                 </a:solidFill>
               </a:rPr>
-              <a:t>✍️ Ejercicios</a:t>
+              <a:t>🧰 Herramientas y preparación</a:t>
             </a:r>
           </a:p>
         </p:txBody>
@@ -4547,82 +4923,67 @@
                   <a:srgbClr val="22282E"/>
                 </a:solidFill>
               </a:rPr>
-              <a:t>•  Diferencia inyección de código de simple creación de proceso a partir de lo visto en Process Hacker.</a:t>
-            </a:r>
-          </a:p>
-          <a:p>
-            <a:pPr>
-              <a:spcAft>
-                <a:spcPts val="600"/>
-              </a:spcAft>
-            </a:pPr>
-            <a:r>
-              <a:rPr sz="1500">
-                <a:solidFill>
-                  <a:srgbClr val="22282E"/>
-                </a:solidFill>
-              </a:rPr>
-              <a:t>•  Documenta la persistencia hallada y cómo eliminarla.</a:t>
-            </a:r>
-          </a:p>
-          <a:p>
-            <a:pPr>
-              <a:spcAft>
-                <a:spcPts val="600"/>
-              </a:spcAft>
-            </a:pPr>
-            <a:r>
-              <a:rPr sz="1500">
-                <a:solidFill>
-                  <a:srgbClr val="22282E"/>
-                </a:solidFill>
-              </a:rPr>
-              <a:t>•  Extrae 5 IOCs de red del pcap y clasifícalos (DNS, HTTP, IP).</a:t>
-            </a:r>
-          </a:p>
-          <a:p>
-            <a:pPr>
-              <a:spcAft>
-                <a:spcPts val="600"/>
-              </a:spcAft>
-            </a:pPr>
-            <a:r>
-              <a:rPr sz="1500">
-                <a:solidFill>
-                  <a:srgbClr val="22282E"/>
-                </a:solidFill>
-              </a:rPr>
-              <a:t>•  Explica por qué el mutex es un buen indicador de detección.</a:t>
-            </a:r>
-          </a:p>
-          <a:p>
-            <a:pPr>
-              <a:spcAft>
-                <a:spcPts val="600"/>
-              </a:spcAft>
-            </a:pPr>
-            <a:r>
-              <a:rPr sz="1500">
-                <a:solidFill>
-                  <a:srgbClr val="22282E"/>
-                </a:solidFill>
-              </a:rPr>
-              <a:t>•  Compara tu análisis manual con el informe del sandbox: ¿qué se le escapó a cada uno?</a:t>
-            </a:r>
-          </a:p>
-          <a:p>
-            <a:pPr>
-              <a:spcAft>
-                <a:spcPts val="600"/>
-              </a:spcAft>
-            </a:pPr>
-            <a:r>
-              <a:rPr sz="1500">
-                <a:solidFill>
-                  <a:srgbClr val="22282E"/>
-                </a:solidFill>
-              </a:rPr>
-              <a:t>•  Diseña un filtro de ProcMon reutilizable para triaje.</a:t>
+              <a:t>•  Process Monitor (ProcMon) y Process Hacker / Process Explorer.</a:t>
+            </a:r>
+          </a:p>
+          <a:p>
+            <a:pPr>
+              <a:spcAft>
+                <a:spcPts val="600"/>
+              </a:spcAft>
+            </a:pPr>
+            <a:r>
+              <a:rPr sz="1500">
+                <a:solidFill>
+                  <a:srgbClr val="22282E"/>
+                </a:solidFill>
+              </a:rPr>
+              <a:t>•  Regshot (snapshot de registro y sistema de archivos antes/después).</a:t>
+            </a:r>
+          </a:p>
+          <a:p>
+            <a:pPr>
+              <a:spcAft>
+                <a:spcPts val="600"/>
+              </a:spcAft>
+            </a:pPr>
+            <a:r>
+              <a:rPr sz="1500">
+                <a:solidFill>
+                  <a:srgbClr val="22282E"/>
+                </a:solidFill>
+              </a:rPr>
+              <a:t>•  Wireshark + INetSim/FakeNet-NG (de la clase 142).</a:t>
+            </a:r>
+          </a:p>
+          <a:p>
+            <a:pPr>
+              <a:spcAft>
+                <a:spcPts val="600"/>
+              </a:spcAft>
+            </a:pPr>
+            <a:r>
+              <a:rPr sz="1500">
+                <a:solidFill>
+                  <a:srgbClr val="22282E"/>
+                </a:solidFill>
+              </a:rPr>
+              <a:t>•  Autoruns (Sysinternals) para persistencia.</a:t>
+            </a:r>
+          </a:p>
+          <a:p>
+            <a:pPr>
+              <a:spcAft>
+                <a:spcPts val="600"/>
+              </a:spcAft>
+            </a:pPr>
+            <a:r>
+              <a:rPr sz="1500">
+                <a:solidFill>
+                  <a:srgbClr val="22282E"/>
+                </a:solidFill>
+              </a:rPr>
+              <a:t>•  Sandbox: CAPEv2 o Cuckoo local; online: Any.Run, Hybrid Analysis (con precauciones de confidencialidad).</a:t>
             </a:r>
           </a:p>
         </p:txBody>
@@ -4673,7 +5034,7 @@
                   <a:srgbClr val="0B3D2E"/>
                 </a:solidFill>
               </a:rPr>
-              <a:t>📝 Reto verificable</a:t>
+              <a:t>🧪 Laboratorio guiado</a:t>
             </a:r>
           </a:p>
         </p:txBody>
@@ -4711,22 +5072,97 @@
                   <a:srgbClr val="22282E"/>
                 </a:solidFill>
               </a:rPr>
-              <a:t>•  Entrega un informe de comportamiento de una muestra con: árbol de procesos, persistencia (clave/servicio/tarea), archivos creados, mutex e IOCs de red, todo respaldado por capturas.</a:t>
-            </a:r>
-          </a:p>
-          <a:p>
-            <a:pPr>
-              <a:spcAft>
-                <a:spcPts val="600"/>
-              </a:spcAft>
-            </a:pPr>
-            <a:r>
-              <a:rPr sz="1500">
-                <a:solidFill>
-                  <a:srgbClr val="22282E"/>
-                </a:solidFill>
-              </a:rPr>
-              <a:t>•  Criterio de aceptación: cada IOC listado aparece en una evidencia (ProcMon/Regshot/Wireshark) referenciada, y el informe indica cómo se detectaría y eliminaría la persistencia.</a:t>
+              <a:t>•  Restaura el snapshot base-clean. Verifica que el aislamiento de red sigue activo y que INetSim responde.</a:t>
+            </a:r>
+          </a:p>
+          <a:p>
+            <a:pPr>
+              <a:spcAft>
+                <a:spcPts val="600"/>
+              </a:spcAft>
+            </a:pPr>
+            <a:r>
+              <a:rPr sz="1500">
+                <a:solidFill>
+                  <a:srgbClr val="22282E"/>
+                </a:solidFill>
+              </a:rPr>
+              <a:t>•  Prepara la instrumentación: abre ProcMon (con filtro por el nombre del proceso), Process Hacker, Wireshark capturando en la interfaz de labnet, y toma un Regshot inicial.</a:t>
+            </a:r>
+          </a:p>
+          <a:p>
+            <a:pPr>
+              <a:spcAft>
+                <a:spcPts val="600"/>
+              </a:spcAft>
+            </a:pPr>
+            <a:r>
+              <a:rPr sz="1500">
+                <a:solidFill>
+                  <a:srgbClr val="22282E"/>
+                </a:solidFill>
+              </a:rPr>
+              <a:t>•  Detona la muestra con privilegios normales. Observa en Process Hacker los procesos hijos y las inyecciones (hilos remotos).</a:t>
+            </a:r>
+          </a:p>
+          <a:p>
+            <a:pPr>
+              <a:spcAft>
+                <a:spcPts val="600"/>
+              </a:spcAft>
+            </a:pPr>
+            <a:r>
+              <a:rPr sz="1500">
+                <a:solidFill>
+                  <a:srgbClr val="22282E"/>
+                </a:solidFill>
+              </a:rPr>
+              <a:t>•  Deja correr ~60–120 s. Toma el segundo Regshot y compara: archivos creados, claves Run, servicios o tareas programadas nuevas.</a:t>
+            </a:r>
+          </a:p>
+          <a:p>
+            <a:pPr>
+              <a:spcAft>
+                <a:spcPts val="600"/>
+              </a:spcAft>
+            </a:pPr>
+            <a:r>
+              <a:rPr sz="1500">
+                <a:solidFill>
+                  <a:srgbClr val="22282E"/>
+                </a:solidFill>
+              </a:rPr>
+              <a:t>•  En ProcMon, filtra por Operation is RegSetValue y por CreateFile para localizar persistencia y drops. Anota rutas y claves.</a:t>
+            </a:r>
+          </a:p>
+          <a:p>
+            <a:pPr>
+              <a:spcAft>
+                <a:spcPts val="600"/>
+              </a:spcAft>
+            </a:pPr>
+            <a:r>
+              <a:rPr sz="1500">
+                <a:solidFill>
+                  <a:srgbClr val="22282E"/>
+                </a:solidFill>
+              </a:rPr>
+              <a:t>•  Revisa Wireshark: dominios consultados (respondidos por INetSim), URIs HTTP, user-agents, patrones de beacon. Extrae IOCs de red.</a:t>
+            </a:r>
+          </a:p>
+          <a:p>
+            <a:pPr>
+              <a:spcAft>
+                <a:spcPts val="600"/>
+              </a:spcAft>
+            </a:pPr>
+            <a:r>
+              <a:rPr sz="1500">
+                <a:solidFill>
+                  <a:srgbClr val="22282E"/>
+                </a:solidFill>
+              </a:rPr>
+              <a:t>•  Identifica el mutex creado (Process Hacker → Handles → Mutant). Anótalo como IOC.</a:t>
             </a:r>
           </a:p>
         </p:txBody>
